--- a/public/downloads/US-114050-L2-Systems-Theory.pptx
+++ b/public/downloads/US-114050-L2-Systems-Theory.pptx
@@ -11284,7 +11284,7 @@
                 <a:ea typeface="Aptos" pitchFamily="34" charset="-122"/>
                 <a:cs typeface="Aptos" pitchFamily="34" charset="-120"/>
               </a:rPr>
-              <a:t>Changes to the state are atomic: either all happen or none happen — database changes, messages and actions on transducers.</a:t>
+              <a:t>All or nothing: an R5,000 transfer must debit the sender AND credit the receiver — or be cancelled entirely.</a:t>
             </a:r>
             <a:endParaRPr lang="en-US" sz="1800" dirty="0"/>
           </a:p>

--- a/public/downloads/US-114050-L2-Systems-Theory.pptx
+++ b/public/downloads/US-114050-L2-Systems-Theory.pptx
@@ -11432,7 +11432,7 @@
                 <a:ea typeface="Aptos" pitchFamily="34" charset="-122"/>
                 <a:cs typeface="Aptos" pitchFamily="34" charset="-120"/>
               </a:rPr>
-              <a:t>A correct transformation of the state — the actions as a group do not violate any integrity constraints.</a:t>
+              <a:t>Follows the rules and keeps the data correct: sender R20,000 → R15,000, receiver R10,000 → R15,000.</a:t>
             </a:r>
             <a:endParaRPr lang="en-US" sz="1800" dirty="0"/>
           </a:p>

--- a/public/downloads/US-114050-L2-Systems-Theory.pptx
+++ b/public/downloads/US-114050-L2-Systems-Theory.pptx
@@ -11580,7 +11580,7 @@
                 <a:ea typeface="Aptos" pitchFamily="34" charset="-122"/>
                 <a:cs typeface="Aptos" pitchFamily="34" charset="-120"/>
               </a:rPr>
-              <a:t>Concurrent transactions appear to each transaction T to have executed before T or after T — but not both.</a:t>
+              <a:t>Simultaneous transactions do not interfere: Client A's R5,000 and Client B's R2,000 each run as if on their own.</a:t>
             </a:r>
             <a:endParaRPr lang="en-US" sz="1800" dirty="0"/>
           </a:p>

--- a/public/downloads/US-114050-L2-Systems-Theory.pptx
+++ b/public/downloads/US-114050-L2-Systems-Theory.pptx
@@ -11728,7 +11728,7 @@
                 <a:ea typeface="Aptos" pitchFamily="34" charset="-122"/>
                 <a:cs typeface="Aptos" pitchFamily="34" charset="-120"/>
               </a:rPr>
-              <a:t>Once a transaction commits, its changes to the state survive failures.</a:t>
+              <a:t>Once the transfer completes, the balances are saved permanently — a crash or power loss cannot undo them.</a:t>
             </a:r>
             <a:endParaRPr lang="en-US" sz="1800" dirty="0"/>
           </a:p>

--- a/public/downloads/US-114050-L2-Systems-Theory.pptx
+++ b/public/downloads/US-114050-L2-Systems-Theory.pptx
@@ -3437,9 +3437,9 @@
             <a:prstDash val="solid"/>
           </a:ln>
           <a:effectLst>
-            <a:outerShdw sx="100000" sy="100000" kx="0" ky="0" algn="bl" rotWithShape="0" blurRad="1.3451784494500981e+91" dist="3.8433669984288512e+90" dir="1.1845953345804043e+107">
+            <a:outerShdw sx="100000" sy="100000" kx="0" ky="0" algn="bl" rotWithShape="0" blurRad="88900" dist="25400" dir="5400000">
               <a:srgbClr val="9AB4CC">
-                <a:alpha val="2.9999999999999997e+109"/>
+                <a:alpha val="30000"/>
               </a:srgbClr>
             </a:outerShdw>
           </a:effectLst>
@@ -3513,9 +3513,9 @@
             <a:prstDash val="solid"/>
           </a:ln>
           <a:effectLst>
-            <a:outerShdw sx="100000" sy="100000" kx="0" ky="0" algn="bl" rotWithShape="0" blurRad="1.7083766308016246e+95" dist="4.8810760880046414e+94" dir="7.107572007482426e+111">
+            <a:outerShdw sx="100000" sy="100000" kx="0" ky="0" algn="bl" rotWithShape="0" blurRad="88900" dist="25400" dir="5400000">
               <a:srgbClr val="9AB4CC">
-                <a:alpha val="2.9999999999999995e+114"/>
+                <a:alpha val="30000"/>
               </a:srgbClr>
             </a:outerShdw>
           </a:effectLst>
@@ -3619,9 +3619,9 @@
             <a:prstDash val="solid"/>
           </a:ln>
           <a:effectLst>
-            <a:outerShdw sx="100000" sy="100000" kx="0" ky="0" algn="bl" rotWithShape="0" blurRad="2.1696383211180632e+99" dist="6.198966631765894e+98" dir="4.2645432044894554e+116">
+            <a:outerShdw sx="100000" sy="100000" kx="0" ky="0" algn="bl" rotWithShape="0" blurRad="88900" dist="25400" dir="5400000">
               <a:srgbClr val="9AB4CC">
-                <a:alpha val="2.9999999999999997e+119"/>
+                <a:alpha val="30000"/>
               </a:srgbClr>
             </a:outerShdw>
           </a:effectLst>
@@ -3725,9 +3725,9 @@
             <a:prstDash val="solid"/>
           </a:ln>
           <a:effectLst>
-            <a:outerShdw sx="100000" sy="100000" kx="0" ky="0" algn="bl" rotWithShape="0" blurRad="2.7554406678199403e+103" dist="7.872687622342685e+102" dir="2.5587259226936733e+121">
+            <a:outerShdw sx="100000" sy="100000" kx="0" ky="0" algn="bl" rotWithShape="0" blurRad="88900" dist="25400" dir="5400000">
               <a:srgbClr val="9AB4CC">
-                <a:alpha val="2.9999999999999995e+124"/>
+                <a:alpha val="30000"/>
               </a:srgbClr>
             </a:outerShdw>
           </a:effectLst>
@@ -3831,9 +3831,9 @@
             <a:prstDash val="solid"/>
           </a:ln>
           <a:effectLst>
-            <a:outerShdw sx="100000" sy="100000" kx="0" ky="0" algn="bl" rotWithShape="0" blurRad="3.499409648131324e+107" dist="9.998313280375211e+106" dir="1.535235553616204e+126">
+            <a:outerShdw sx="100000" sy="100000" kx="0" ky="0" algn="bl" rotWithShape="0" blurRad="88900" dist="25400" dir="5400000">
               <a:srgbClr val="9AB4CC">
-                <a:alpha val="2.9999999999999997e+129"/>
+                <a:alpha val="30000"/>
               </a:srgbClr>
             </a:outerShdw>
           </a:effectLst>
@@ -3937,9 +3937,9 @@
             <a:prstDash val="solid"/>
           </a:ln>
           <a:effectLst>
-            <a:outerShdw sx="100000" sy="100000" kx="0" ky="0" algn="bl" rotWithShape="0" blurRad="4.4442502531267815e+111" dist="1.2697857866076517e+111" dir="9.211413321697224e+130">
+            <a:outerShdw sx="100000" sy="100000" kx="0" ky="0" algn="bl" rotWithShape="0" blurRad="88900" dist="25400" dir="5400000">
               <a:srgbClr val="9AB4CC">
-                <a:alpha val="2.9999999999999996e+134"/>
+                <a:alpha val="30000"/>
               </a:srgbClr>
             </a:outerShdw>
           </a:effectLst>
@@ -4251,9 +4251,9 @@
             <a:prstDash val="solid"/>
           </a:ln>
           <a:effectLst>
-            <a:outerShdw sx="100000" sy="100000" kx="0" ky="0" algn="bl" rotWithShape="0" blurRad="5.644197821471012e+115" dist="1.6126279489917177e+115" dir="5.526847993018334e+135">
+            <a:outerShdw sx="100000" sy="100000" kx="0" ky="0" algn="bl" rotWithShape="0" blurRad="88900" dist="25400" dir="5400000">
               <a:srgbClr val="9AB4CC">
-                <a:alpha val="2.9999999999999994e+139"/>
+                <a:alpha val="30000"/>
               </a:srgbClr>
             </a:outerShdw>
           </a:effectLst>
@@ -4399,9 +4399,9 @@
             <a:prstDash val="solid"/>
           </a:ln>
           <a:effectLst>
-            <a:outerShdw sx="100000" sy="100000" kx="0" ky="0" algn="bl" rotWithShape="0" blurRad="7.168131233268186e+119" dist="2.0480374952194813e+119" dir="3.3161087958110005e+140">
+            <a:outerShdw sx="100000" sy="100000" kx="0" ky="0" algn="bl" rotWithShape="0" blurRad="88900" dist="25400" dir="5400000">
               <a:srgbClr val="9AB4CC">
-                <a:alpha val="2.9999999999999996e+144"/>
+                <a:alpha val="30000"/>
               </a:srgbClr>
             </a:outerShdw>
           </a:effectLst>
@@ -4547,9 +4547,9 @@
             <a:prstDash val="solid"/>
           </a:ln>
           <a:effectLst>
-            <a:outerShdw sx="100000" sy="100000" kx="0" ky="0" algn="bl" rotWithShape="0" blurRad="9.103526666250596e+123" dist="2.6010076189287412e+123" dir="1.9896652774866004e+145">
+            <a:outerShdw sx="100000" sy="100000" kx="0" ky="0" algn="bl" rotWithShape="0" blurRad="88900" dist="25400" dir="5400000">
               <a:srgbClr val="9AB4CC">
-                <a:alpha val="2.9999999999999996e+149"/>
+                <a:alpha val="30000"/>
               </a:srgbClr>
             </a:outerShdw>
           </a:effectLst>
@@ -6292,9 +6292,9 @@
             <a:prstDash val="solid"/>
           </a:ln>
           <a:effectLst>
-            <a:outerShdw sx="100000" sy="100000" kx="0" ky="0" algn="bl" rotWithShape="0" blurRad="1.1561478866138256e+128" dist="3.303279676039501e+127" dir="1.1937991664919603e+150">
+            <a:outerShdw sx="100000" sy="100000" kx="0" ky="0" algn="bl" rotWithShape="0" blurRad="88900" dist="25400" dir="5400000">
               <a:srgbClr val="9AB4CC">
-                <a:alpha val="2.9999999999999997e+154"/>
+                <a:alpha val="30000"/>
               </a:srgbClr>
             </a:outerShdw>
           </a:effectLst>
@@ -6440,9 +6440,9 @@
             <a:prstDash val="solid"/>
           </a:ln>
           <a:effectLst>
-            <a:outerShdw sx="100000" sy="100000" kx="0" ky="0" algn="bl" rotWithShape="0" blurRad="1.4683078159995586e+132" dist="4.195165188570166e+131" dir="7.162794998951762e+154">
+            <a:outerShdw sx="100000" sy="100000" kx="0" ky="0" algn="bl" rotWithShape="0" blurRad="88900" dist="25400" dir="5400000">
               <a:srgbClr val="9AB4CC">
-                <a:alpha val="2.9999999999999998e+159"/>
+                <a:alpha val="30000"/>
               </a:srgbClr>
             </a:outerShdw>
           </a:effectLst>
@@ -6588,9 +6588,9 @@
             <a:prstDash val="solid"/>
           </a:ln>
           <a:effectLst>
-            <a:outerShdw sx="100000" sy="100000" kx="0" ky="0" algn="bl" rotWithShape="0" blurRad="1.8647509263194394e+136" dist="5.327859789484111e+135" dir="4.297676999371057e+159">
+            <a:outerShdw sx="100000" sy="100000" kx="0" ky="0" algn="bl" rotWithShape="0" blurRad="88900" dist="25400" dir="5400000">
               <a:srgbClr val="9AB4CC">
-                <a:alpha val="3e+164"/>
+                <a:alpha val="30000"/>
               </a:srgbClr>
             </a:outerShdw>
           </a:effectLst>
@@ -6983,9 +6983,9 @@
             <a:prstDash val="solid"/>
           </a:ln>
           <a:effectLst>
-            <a:outerShdw sx="100000" sy="100000" kx="0" ky="0" algn="bl" rotWithShape="0" blurRad="2.368233676425688e+140" dist="6.766381932644821e+139" dir="2.5786061996226343e+164">
+            <a:outerShdw sx="100000" sy="100000" kx="0" ky="0" algn="bl" rotWithShape="0" blurRad="88900" dist="25400" dir="5400000">
               <a:srgbClr val="9AB4CC">
-                <a:alpha val="3e+169"/>
+                <a:alpha val="30000"/>
               </a:srgbClr>
             </a:outerShdw>
           </a:effectLst>
@@ -7131,9 +7131,9 @@
             <a:prstDash val="solid"/>
           </a:ln>
           <a:effectLst>
-            <a:outerShdw sx="100000" sy="100000" kx="0" ky="0" algn="bl" rotWithShape="0" blurRad="3.0076567690606238e+144" dist="8.593305054458923e+143" dir="1.5471637197735807e+169">
+            <a:outerShdw sx="100000" sy="100000" kx="0" ky="0" algn="bl" rotWithShape="0" blurRad="88900" dist="25400" dir="5400000">
               <a:srgbClr val="9AB4CC">
-                <a:alpha val="3e+174"/>
+                <a:alpha val="30000"/>
               </a:srgbClr>
             </a:outerShdw>
           </a:effectLst>
@@ -7279,9 +7279,9 @@
             <a:prstDash val="solid"/>
           </a:ln>
           <a:effectLst>
-            <a:outerShdw sx="100000" sy="100000" kx="0" ky="0" algn="bl" rotWithShape="0" blurRad="3.819724096706992e+148" dist="1.0913497419162833e+148" dir="9.282982318641485e+173">
+            <a:outerShdw sx="100000" sy="100000" kx="0" ky="0" algn="bl" rotWithShape="0" blurRad="88900" dist="25400" dir="5400000">
               <a:srgbClr val="9AB4CC">
-                <a:alpha val="3e+179"/>
+                <a:alpha val="30000"/>
               </a:srgbClr>
             </a:outerShdw>
           </a:effectLst>
@@ -7427,9 +7427,9 @@
             <a:prstDash val="solid"/>
           </a:ln>
           <a:effectLst>
-            <a:outerShdw sx="100000" sy="100000" kx="0" ky="0" algn="bl" rotWithShape="0" blurRad="4.85104960281788e+152" dist="1.38601417223368e+152" dir="5.569789391184891e+178">
+            <a:outerShdw sx="100000" sy="100000" kx="0" ky="0" algn="bl" rotWithShape="0" blurRad="88900" dist="25400" dir="5400000">
               <a:srgbClr val="9AB4CC">
-                <a:alpha val="3e+184"/>
+                <a:alpha val="30000"/>
               </a:srgbClr>
             </a:outerShdw>
           </a:effectLst>
@@ -8581,9 +8581,9 @@
             <a:prstDash val="solid"/>
           </a:ln>
           <a:effectLst>
-            <a:outerShdw sx="100000" sy="100000" kx="0" ky="0" algn="bl" rotWithShape="0" blurRad="1129030000" dist="322580000" dir="324000000000">
+            <a:outerShdw sx="100000" sy="100000" kx="0" ky="0" algn="bl" rotWithShape="0" blurRad="88900" dist="25400" dir="5400000">
               <a:srgbClr val="9AB4CC">
-                <a:alpha val="3000000000"/>
+                <a:alpha val="30000"/>
               </a:srgbClr>
             </a:outerShdw>
           </a:effectLst>
@@ -8729,9 +8729,9 @@
             <a:prstDash val="solid"/>
           </a:ln>
           <a:effectLst>
-            <a:outerShdw sx="100000" sy="100000" kx="0" ky="0" algn="bl" rotWithShape="0" blurRad="14338681000000" dist="4096766000000" dir="19440000000000000">
+            <a:outerShdw sx="100000" sy="100000" kx="0" ky="0" algn="bl" rotWithShape="0" blurRad="88900" dist="25400" dir="5400000">
               <a:srgbClr val="9AB4CC">
-                <a:alpha val="300000000000000"/>
+                <a:alpha val="30000"/>
               </a:srgbClr>
             </a:outerShdw>
           </a:effectLst>
@@ -9094,9 +9094,9 @@
             <a:prstDash val="solid"/>
           </a:ln>
           <a:effectLst>
-            <a:outerShdw sx="100000" sy="100000" kx="0" ky="0" algn="bl" rotWithShape="0" blurRad="182101248700000000" dist="52028928200000000" dir="1.1664e+21">
+            <a:outerShdw sx="100000" sy="100000" kx="0" ky="0" algn="bl" rotWithShape="0" blurRad="88900" dist="25400" dir="5400000">
               <a:srgbClr val="9AB4CC">
-                <a:alpha val="30000000000000000000"/>
+                <a:alpha val="30000"/>
               </a:srgbClr>
             </a:outerShdw>
           </a:effectLst>
@@ -9242,9 +9242,9 @@
             <a:prstDash val="solid"/>
           </a:ln>
           <a:effectLst>
-            <a:outerShdw sx="100000" sy="100000" kx="0" ky="0" algn="bl" rotWithShape="0" blurRad="2.31268585849e+21" dist="660767388140000000000" dir="6.9984e+25">
+            <a:outerShdw sx="100000" sy="100000" kx="0" ky="0" algn="bl" rotWithShape="0" blurRad="88900" dist="25400" dir="5400000">
               <a:srgbClr val="9AB4CC">
-                <a:alpha val="3e+24"/>
+                <a:alpha val="30000"/>
               </a:srgbClr>
             </a:outerShdw>
           </a:effectLst>
@@ -9390,9 +9390,9 @@
             <a:prstDash val="solid"/>
           </a:ln>
           <a:effectLst>
-            <a:outerShdw sx="100000" sy="100000" kx="0" ky="0" algn="bl" rotWithShape="0" blurRad="2.9371110402823e+25" dist="8.391745829378e+24" dir="4.19904e+30">
+            <a:outerShdw sx="100000" sy="100000" kx="0" ky="0" algn="bl" rotWithShape="0" blurRad="88900" dist="25400" dir="5400000">
               <a:srgbClr val="9AB4CC">
-                <a:alpha val="3e+29"/>
+                <a:alpha val="30000"/>
               </a:srgbClr>
             </a:outerShdw>
           </a:effectLst>
@@ -9538,9 +9538,9 @@
             <a:prstDash val="solid"/>
           </a:ln>
           <a:effectLst>
-            <a:outerShdw sx="100000" sy="100000" kx="0" ky="0" algn="bl" rotWithShape="0" blurRad="3.730131021158521e+29" dist="1.0657517203310059e+29" dir="2.519424e+35">
+            <a:outerShdw sx="100000" sy="100000" kx="0" ky="0" algn="bl" rotWithShape="0" blurRad="88900" dist="25400" dir="5400000">
               <a:srgbClr val="9AB4CC">
-                <a:alpha val="2.9999999999999997e+34"/>
+                <a:alpha val="30000"/>
               </a:srgbClr>
             </a:outerShdw>
           </a:effectLst>
@@ -9686,9 +9686,9 @@
             <a:prstDash val="solid"/>
           </a:ln>
           <a:effectLst>
-            <a:outerShdw sx="100000" sy="100000" kx="0" ky="0" algn="bl" rotWithShape="0" blurRad="4.737266396871321e+33" dist="1.3535046848203775e+33" dir="1.5116544e+40">
+            <a:outerShdw sx="100000" sy="100000" kx="0" ky="0" algn="bl" rotWithShape="0" blurRad="88900" dist="25400" dir="5400000">
               <a:srgbClr val="9AB4CC">
-                <a:alpha val="3e+39"/>
+                <a:alpha val="30000"/>
               </a:srgbClr>
             </a:outerShdw>
           </a:effectLst>
@@ -10368,9 +10368,9 @@
             <a:prstDash val="solid"/>
           </a:ln>
           <a:effectLst>
-            <a:outerShdw sx="100000" sy="100000" kx="0" ky="0" algn="bl" rotWithShape="0" blurRad="6.016328324026578e+37" dist="1.7189509497218795e+37" dir="9.069926400000001e+44">
+            <a:outerShdw sx="100000" sy="100000" kx="0" ky="0" algn="bl" rotWithShape="0" blurRad="88900" dist="25400" dir="5400000">
               <a:srgbClr val="9AB4CC">
-                <a:alpha val="3e+44"/>
+                <a:alpha val="30000"/>
               </a:srgbClr>
             </a:outerShdw>
           </a:effectLst>
@@ -10516,9 +10516,9 @@
             <a:prstDash val="solid"/>
           </a:ln>
           <a:effectLst>
-            <a:outerShdw sx="100000" sy="100000" kx="0" ky="0" algn="bl" rotWithShape="0" blurRad="7.640736971513755e+41" dist="2.183067706146787e+41" dir="5.44195584e+49">
+            <a:outerShdw sx="100000" sy="100000" kx="0" ky="0" algn="bl" rotWithShape="0" blurRad="88900" dist="25400" dir="5400000">
               <a:srgbClr val="9AB4CC">
-                <a:alpha val="2.9999999999999997e+49"/>
+                <a:alpha val="30000"/>
               </a:srgbClr>
             </a:outerShdw>
           </a:effectLst>
@@ -10664,9 +10664,9 @@
             <a:prstDash val="solid"/>
           </a:ln>
           <a:effectLst>
-            <a:outerShdw sx="100000" sy="100000" kx="0" ky="0" algn="bl" rotWithShape="0" blurRad="9.703735953822469e+45" dist="2.7724959868064195e+45" dir="3.2651735040000005e+54">
+            <a:outerShdw sx="100000" sy="100000" kx="0" ky="0" algn="bl" rotWithShape="0" blurRad="88900" dist="25400" dir="5400000">
               <a:srgbClr val="9AB4CC">
-                <a:alpha val="2.9999999999999996e+54"/>
+                <a:alpha val="30000"/>
               </a:srgbClr>
             </a:outerShdw>
           </a:effectLst>
@@ -10812,9 +10812,9 @@
             <a:prstDash val="solid"/>
           </a:ln>
           <a:effectLst>
-            <a:outerShdw sx="100000" sy="100000" kx="0" ky="0" algn="bl" rotWithShape="0" blurRad="1.2323744661354536e+50" dist="3.5210699032441527e+49" dir="1.9591041024000004e+59">
+            <a:outerShdw sx="100000" sy="100000" kx="0" ky="0" algn="bl" rotWithShape="0" blurRad="88900" dist="25400" dir="5400000">
               <a:srgbClr val="9AB4CC">
-                <a:alpha val="2.9999999999999996e+59"/>
+                <a:alpha val="30000"/>
               </a:srgbClr>
             </a:outerShdw>
           </a:effectLst>
@@ -11168,9 +11168,9 @@
             <a:prstDash val="solid"/>
           </a:ln>
           <a:effectLst>
-            <a:outerShdw sx="100000" sy="100000" kx="0" ky="0" algn="bl" rotWithShape="0" blurRad="1.5651155719920262e+54" dist="4.471758777120074e+53" dir="1.1754624614400003e+64">
+            <a:outerShdw sx="100000" sy="100000" kx="0" ky="0" algn="bl" rotWithShape="0" blurRad="88900" dist="25400" dir="5400000">
               <a:srgbClr val="9AB4CC">
-                <a:alpha val="2.9999999999999996e+64"/>
+                <a:alpha val="30000"/>
               </a:srgbClr>
             </a:outerShdw>
           </a:effectLst>
@@ -11316,9 +11316,9 @@
             <a:prstDash val="solid"/>
           </a:ln>
           <a:effectLst>
-            <a:outerShdw sx="100000" sy="100000" kx="0" ky="0" algn="bl" rotWithShape="0" blurRad="1.9876967764298733e+58" dist="5.679133646942494e+57" dir="7.052774768640002e+68">
+            <a:outerShdw sx="100000" sy="100000" kx="0" ky="0" algn="bl" rotWithShape="0" blurRad="88900" dist="25400" dir="5400000">
               <a:srgbClr val="9AB4CC">
-                <a:alpha val="2.9999999999999995e+69"/>
+                <a:alpha val="30000"/>
               </a:srgbClr>
             </a:outerShdw>
           </a:effectLst>
@@ -11464,9 +11464,9 @@
             <a:prstDash val="solid"/>
           </a:ln>
           <a:effectLst>
-            <a:outerShdw sx="100000" sy="100000" kx="0" ky="0" algn="bl" rotWithShape="0" blurRad="2.524374906065939e+62" dist="7.212499731616968e+61" dir="4.2316648611840007e+73">
+            <a:outerShdw sx="100000" sy="100000" kx="0" ky="0" algn="bl" rotWithShape="0" blurRad="88900" dist="25400" dir="5400000">
               <a:srgbClr val="9AB4CC">
-                <a:alpha val="2.9999999999999995e+74"/>
+                <a:alpha val="30000"/>
               </a:srgbClr>
             </a:outerShdw>
           </a:effectLst>
@@ -11612,9 +11612,9 @@
             <a:prstDash val="solid"/>
           </a:ln>
           <a:effectLst>
-            <a:outerShdw sx="100000" sy="100000" kx="0" ky="0" algn="bl" rotWithShape="0" blurRad="3.2059561307037426e+66" dist="9.15987465915355e+65" dir="2.5389989167104004e+78">
+            <a:outerShdw sx="100000" sy="100000" kx="0" ky="0" algn="bl" rotWithShape="0" blurRad="88900" dist="25400" dir="5400000">
               <a:srgbClr val="9AB4CC">
-                <a:alpha val="3e+79"/>
+                <a:alpha val="30000"/>
               </a:srgbClr>
             </a:outerShdw>
           </a:effectLst>
@@ -12010,9 +12010,9 @@
             <a:prstDash val="solid"/>
           </a:ln>
           <a:effectLst>
-            <a:outerShdw sx="100000" sy="100000" kx="0" ky="0" algn="bl" rotWithShape="0" blurRad="4.071564285993753e+70" dist="1.1633040817125008e+70" dir="1.5233993500262402e+83">
+            <a:outerShdw sx="100000" sy="100000" kx="0" ky="0" algn="bl" rotWithShape="0" blurRad="88900" dist="25400" dir="5400000">
               <a:srgbClr val="9AB4CC">
-                <a:alpha val="2.9999999999999995e+84"/>
+                <a:alpha val="30000"/>
               </a:srgbClr>
             </a:outerShdw>
           </a:effectLst>
@@ -12158,9 +12158,9 @@
             <a:prstDash val="solid"/>
           </a:ln>
           <a:effectLst>
-            <a:outerShdw sx="100000" sy="100000" kx="0" ky="0" algn="bl" rotWithShape="0" blurRad="5.170886643212067e+74" dist="1.477396183774876e+74" dir="9.14039610015744e+87">
+            <a:outerShdw sx="100000" sy="100000" kx="0" ky="0" algn="bl" rotWithShape="0" blurRad="88900" dist="25400" dir="5400000">
               <a:srgbClr val="9AB4CC">
-                <a:alpha val="2.9999999999999996e+89"/>
+                <a:alpha val="30000"/>
               </a:srgbClr>
             </a:outerShdw>
           </a:effectLst>
@@ -12306,9 +12306,9 @@
             <a:prstDash val="solid"/>
           </a:ln>
           <a:effectLst>
-            <a:outerShdw sx="100000" sy="100000" kx="0" ky="0" algn="bl" rotWithShape="0" blurRad="6.567026036879325e+78" dist="1.8762931533940924e+78" dir="5.484237660094465e+92">
+            <a:outerShdw sx="100000" sy="100000" kx="0" ky="0" algn="bl" rotWithShape="0" blurRad="88900" dist="25400" dir="5400000">
               <a:srgbClr val="9AB4CC">
-                <a:alpha val="2.9999999999999997e+94"/>
+                <a:alpha val="30000"/>
               </a:srgbClr>
             </a:outerShdw>
           </a:effectLst>
@@ -12662,9 +12662,9 @@
             <a:prstDash val="solid"/>
           </a:ln>
           <a:effectLst>
-            <a:outerShdw sx="100000" sy="100000" kx="0" ky="0" algn="bl" rotWithShape="0" blurRad="8.340123066836742e+82" dist="2.3828923048104974e+82" dir="3.2905425960566786e+97">
+            <a:outerShdw sx="100000" sy="100000" kx="0" ky="0" algn="bl" rotWithShape="0" blurRad="88900" dist="25400" dir="5400000">
               <a:srgbClr val="9AB4CC">
-                <a:alpha val="2.9999999999999997e+99"/>
+                <a:alpha val="30000"/>
               </a:srgbClr>
             </a:outerShdw>
           </a:effectLst>
@@ -12810,9 +12810,9 @@
             <a:prstDash val="solid"/>
           </a:ln>
           <a:effectLst>
-            <a:outerShdw sx="100000" sy="100000" kx="0" ky="0" algn="bl" rotWithShape="0" blurRad="1.0591956294882662e+87" dist="3.0262732271093317e+86" dir="1.9743255576340073e+102">
+            <a:outerShdw sx="100000" sy="100000" kx="0" ky="0" algn="bl" rotWithShape="0" blurRad="88900" dist="25400" dir="5400000">
               <a:srgbClr val="9AB4CC">
-                <a:alpha val="3e+104"/>
+                <a:alpha val="30000"/>
               </a:srgbClr>
             </a:outerShdw>
           </a:effectLst>
